--- a/BACKUP&RECOVERY/06장/06장_NOARCHIVELOG_복구_컨트롤파일_장애.pptx
+++ b/BACKUP&RECOVERY/06장/06장_NOARCHIVELOG_복구_컨트롤파일_장애.pptx
@@ -8250,7 +8250,7 @@
                 <a:latin typeface="Consolas"/>
                 <a:ea typeface="Consolas"/>
               </a:rPr>
-              <a:t>SYS@orcl&gt; !cp -p /u02/oradata/ORCL/control03.ctl \</a:t>
+              <a:t>SYS@orcl&gt; !cp -p /u02/oradata/orcl/control03.ctl \</a:t>
             </a:r>
           </a:p>
           <a:p>
@@ -8267,7 +8267,7 @@
                 <a:latin typeface="Consolas"/>
                 <a:ea typeface="Consolas"/>
               </a:rPr>
-              <a:t>                 /u01/app/oracle/oradata/ORCL/control01.ctl</a:t>
+              <a:t>                 /u01/app/oracle/oradata/orcl/control01.ctl</a:t>
             </a:r>
           </a:p>
           <a:p>
@@ -9668,7 +9668,7 @@
                 <a:latin typeface="Consolas"/>
                 <a:ea typeface="Consolas"/>
               </a:rPr>
-              <a:t>                 /u01/app/oracle/oradata/ORCL/control01.ctl</a:t>
+              <a:t>                 /u01/app/oracle/oradata/orcl/control01.ctl</a:t>
             </a:r>
           </a:p>
           <a:p>
@@ -9821,7 +9821,7 @@
                 <a:latin typeface="Consolas"/>
                 <a:ea typeface="Consolas"/>
               </a:rPr>
-              <a:t>/u01/app/oracle/oradata/ORCL/redo03.log</a:t>
+              <a:t>/u01/app/oracle/oradata/orcl/redo03.log</a:t>
             </a:r>
           </a:p>
           <a:p>
@@ -10494,7 +10494,7 @@
                 <a:latin typeface="Consolas"/>
                 <a:ea typeface="Consolas"/>
               </a:rPr>
-              <a:t>         3         71 INACTIVE   /u01/app/oracle/oradata/ORCL/redo03.log</a:t>
+              <a:t>         3         71 INACTIVE   /u01/app/oracle/oradata/orcl/redo03.log</a:t>
             </a:r>
           </a:p>
           <a:p>
@@ -10511,7 +10511,7 @@
                 <a:latin typeface="Consolas"/>
                 <a:ea typeface="Consolas"/>
               </a:rPr>
-              <a:t>         4         72 INACTIVE   /u01/app/oracle/oradata/ORCL/redo04.log</a:t>
+              <a:t>         4         72 INACTIVE   /u01/app/oracle/oradata/orcl/redo04.log</a:t>
             </a:r>
           </a:p>
           <a:p>
@@ -10528,7 +10528,7 @@
                 <a:latin typeface="Consolas"/>
                 <a:ea typeface="Consolas"/>
               </a:rPr>
-              <a:t>         1         73 CURRENT    /u01/app/oracle/oradata/ORCL/redo01.log</a:t>
+              <a:t>         1         73 CURRENT    /u01/app/oracle/oradata/orcl/redo01.log</a:t>
             </a:r>
           </a:p>
           <a:p>
@@ -11626,7 +11626,7 @@
                 <a:latin typeface="Consolas"/>
                 <a:ea typeface="Consolas"/>
               </a:rPr>
-              <a:t>    '/u01/app/oracle/oradata/ORCL/redo01.log',</a:t>
+              <a:t>    '/u01/app/oracle/oradata/orcl/redo01.log',</a:t>
             </a:r>
           </a:p>
           <a:p>
@@ -11643,7 +11643,7 @@
                 <a:latin typeface="Consolas"/>
                 <a:ea typeface="Consolas"/>
               </a:rPr>
-              <a:t>    '/u02/oradata/ORCL/redo01b.log'</a:t>
+              <a:t>    '/u02/oradata/orcl/redo01b.log'</a:t>
             </a:r>
           </a:p>
           <a:p>
@@ -11694,7 +11694,7 @@
                 <a:latin typeface="Consolas"/>
                 <a:ea typeface="Consolas"/>
               </a:rPr>
-              <a:t>  '/u01/app/oracle/oradata/ORCL/system01.dbf',</a:t>
+              <a:t>  '/u01/app/oracle/oradata/orcl/system01.dbf',</a:t>
             </a:r>
           </a:p>
           <a:p>
@@ -11711,7 +11711,7 @@
                 <a:latin typeface="Consolas"/>
                 <a:ea typeface="Consolas"/>
               </a:rPr>
-              <a:t>  '/u01/app/oracle/oradata/ORCL/users01.dbf'</a:t>
+              <a:t>  '/u01/app/oracle/oradata/orcl/users01.dbf'</a:t>
             </a:r>
           </a:p>
           <a:p>
@@ -12500,7 +12500,7 @@
                 <a:latin typeface="Consolas"/>
                 <a:ea typeface="Consolas"/>
               </a:rPr>
-              <a:t>SYS@orcl&gt; !rm -f /u01/app/oracle/oradata/ORCL/*.ctl /u02/oradata/ORCL/*.ctl</a:t>
+              <a:t>SYS@orcl&gt; !rm -f /u01/app/oracle/oradata/orcl/*.ctl /u02/oradata/orcl/*.ctl</a:t>
             </a:r>
           </a:p>
           <a:p>
@@ -18999,7 +18999,7 @@
                 <a:latin typeface="Consolas"/>
                 <a:ea typeface="Consolas"/>
               </a:rPr>
-              <a:t>/u01/app/oracle/oradata/ORCL/control01.ctl        16384           1142</a:t>
+              <a:t>/u01/app/oracle/oradata/orcl/control01.ctl        16384           1142</a:t>
             </a:r>
           </a:p>
           <a:p>
@@ -19016,7 +19016,7 @@
                 <a:latin typeface="Consolas"/>
                 <a:ea typeface="Consolas"/>
               </a:rPr>
-              <a:t>/u01/app/oracle/oradata/ORCL/control02.ctl        16384           1142</a:t>
+              <a:t>/u01/app/oracle/oradata/orcl/control02.ctl        16384           1142</a:t>
             </a:r>
           </a:p>
           <a:p>
@@ -19033,7 +19033,7 @@
                 <a:latin typeface="Consolas"/>
                 <a:ea typeface="Consolas"/>
               </a:rPr>
-              <a:t>/u02/oradata/ORCL/control03.ctl                   16384           1142</a:t>
+              <a:t>/u02/oradata/orcl/control03.ctl                   16384           1142</a:t>
             </a:r>
           </a:p>
           <a:p>
@@ -20009,7 +20009,7 @@
                 <a:latin typeface="Consolas"/>
                 <a:ea typeface="Consolas"/>
               </a:rPr>
-              <a:t>ORA-00202: control file: '/u01/app/oracle/oradata/ORCL/control01.ctl'</a:t>
+              <a:t>ORA-00202: control file: '/u01/app/oracle/oradata/orcl/control01.ctl'</a:t>
             </a:r>
           </a:p>
           <a:p>
